--- a/public/downloads/dime-time-timeline-deck.pptx
+++ b/public/downloads/dime-time-timeline-deck.pptx
@@ -10072,45 +10072,6 @@
                 <a:latin typeface="Poppins"/>
               </a:rPr>
               <a:t>A first iOS app (“Dime Time Technologies”) starts taking shape — ~60 commits of work that won't survive the year.</a:t>
-            </a:r>
-          </a:p>
-        </p:txBody>
-      </p:sp>
-      <p:sp>
-        <p:nvSpPr>
-          <p:cNvPr id="8" name="TextBox 7"/>
-          <p:cNvSpPr txBox="1"/>
-          <p:nvPr/>
-        </p:nvSpPr>
-        <p:spPr>
-          <a:xfrm>
-            <a:off x="685800" y="5943600"/>
-            <a:ext cx="10789920" cy="548640"/>
-          </a:xfrm>
-          <a:prstGeom prst="rect">
-            <a:avLst/>
-          </a:prstGeom>
-          <a:noFill/>
-        </p:spPr>
-        <p:txBody>
-          <a:bodyPr wrap="square">
-            <a:spAutoFit/>
-          </a:bodyPr>
-          <a:lstStyle/>
-          <a:p>
-            <a:pPr algn="l">
-              <a:spcAft>
-                <a:spcPts val="600"/>
-              </a:spcAft>
-            </a:pPr>
-            <a:r>
-              <a:rPr sz="1300" b="0">
-                <a:solidFill>
-                  <a:srgbClr val="4A468F"/>
-                </a:solidFill>
-                <a:latin typeface="Poppins"/>
-              </a:rPr>
-              <a:t>Tip for the live talk: drop an early app screenshot here — primitive beginnings make the finished product hit harder.</a:t>
             </a:r>
           </a:p>
         </p:txBody>
